--- a/protected-downloads/praesentation/M17.pptx
+++ b/protected-downloads/praesentation/M17.pptx
@@ -794,7 +794,7 @@
           <a:lstStyle/>
           <a:p>
             <a:r>
-              <a:t>Reporting-Cockpits und VR-NetWorld ergänzen: was wann wozu abrufen?</a:t>
+              <a:t>Reporting-Cockpits und BankingManager ergänzen: was wann wozu abrufen?</a:t>
             </a:r>
           </a:p>
         </p:txBody>
